--- a/concepts/randomness/.graphics/sample plots.pptx
+++ b/concepts/randomness/.graphics/sample plots.pptx
@@ -42,7 +42,7 @@
         <p:spPr>
           <a:xfrm>
             <a:off x="504000" y="226080"/>
-            <a:ext cx="9071640" cy="946440"/>
+            <a:ext cx="9071280" cy="946080"/>
           </a:xfrm>
           <a:prstGeom prst="rect">
             <a:avLst/>
@@ -82,7 +82,7 @@
         <p:spPr>
           <a:xfrm>
             <a:off x="504000" y="1326600"/>
-            <a:ext cx="9071640" cy="3288240"/>
+            <a:ext cx="9072000" cy="3288600"/>
           </a:xfrm>
           <a:prstGeom prst="rect">
             <a:avLst/>
@@ -116,7 +116,7 @@
             <a:spLocks noGrp="1"/>
           </p:cNvSpPr>
           <p:nvPr>
-            <p:ph type="ftr" idx="2"/>
+            <p:ph type="ftr" idx="1"/>
           </p:nvPr>
         </p:nvSpPr>
         <p:spPr/>
@@ -136,14 +136,14 @@
             <a:spLocks noGrp="1"/>
           </p:cNvSpPr>
           <p:nvPr>
-            <p:ph type="sldNum" idx="3"/>
+            <p:ph type="sldNum" idx="2"/>
           </p:nvPr>
         </p:nvSpPr>
         <p:spPr/>
         <p:txBody>
           <a:bodyPr/>
           <a:p>
-            <a:fld id="{CEA6E840-37BE-48FF-BC1D-42519C326DC1}" type="slidenum">
+            <a:fld id="{9A2D8CC1-63E2-406D-A474-809593D80646}" type="slidenum">
               <a:t>&lt;#&gt;</a:t>
             </a:fld>
           </a:p>
@@ -156,7 +156,7 @@
             <a:spLocks noGrp="1"/>
           </p:cNvSpPr>
           <p:nvPr>
-            <p:ph type="dt" idx="1"/>
+            <p:ph type="dt" idx="3"/>
           </p:nvPr>
         </p:nvSpPr>
         <p:spPr/>
@@ -205,7 +205,7 @@
         <p:spPr>
           <a:xfrm>
             <a:off x="504000" y="226080"/>
-            <a:ext cx="9071640" cy="946440"/>
+            <a:ext cx="9071280" cy="946080"/>
           </a:xfrm>
           <a:prstGeom prst="rect">
             <a:avLst/>
@@ -220,11 +220,11 @@
             <a:noAutofit/>
           </a:bodyPr>
           <a:p>
-            <a:pPr indent="0" algn="ctr">
+            <a:pPr indent="0">
               <a:buNone/>
             </a:pPr>
             <a:r>
-              <a:rPr b="0" lang="en-US" sz="4400" spc="-1" strike="noStrike">
+              <a:rPr b="0" lang="en-US" sz="1800" spc="-1" strike="noStrike">
                 <a:solidFill>
                   <a:srgbClr val="000000"/>
                 </a:solidFill>
@@ -232,7 +232,7 @@
               </a:rPr>
               <a:t>Click to edit the title text format</a:t>
             </a:r>
-            <a:endParaRPr b="0" lang="en-US" sz="4400" spc="-1" strike="noStrike">
+            <a:endParaRPr b="0" lang="en-US" sz="1800" spc="-1" strike="noStrike">
               <a:solidFill>
                 <a:srgbClr val="000000"/>
               </a:solidFill>
@@ -248,13 +248,13 @@
             <a:spLocks noGrp="1"/>
           </p:cNvSpPr>
           <p:nvPr>
-            <p:ph type="body"/>
+            <p:ph type="ftr" idx="1"/>
           </p:nvPr>
         </p:nvSpPr>
         <p:spPr>
           <a:xfrm>
-            <a:off x="504000" y="1326600"/>
-            <a:ext cx="9071640" cy="3288240"/>
+            <a:off x="3447360" y="5165280"/>
+            <a:ext cx="3194640" cy="390240"/>
           </a:xfrm>
           <a:prstGeom prst="rect">
             <a:avLst/>
@@ -266,202 +266,49 @@
         </p:spPr>
         <p:txBody>
           <a:bodyPr lIns="0" rIns="0" tIns="0" bIns="0" anchor="t">
-            <a:normAutofit/>
+            <a:noAutofit/>
           </a:bodyPr>
-          <a:p>
-            <a:pPr marL="432000" indent="-324000">
-              <a:spcBef>
-                <a:spcPts val="1417"/>
-              </a:spcBef>
-              <a:buClr>
-                <a:srgbClr val="000000"/>
-              </a:buClr>
-              <a:buSzPct val="45000"/>
-              <a:buFont typeface="Wingdings" charset="2"/>
-              <a:buChar char=""/>
-            </a:pPr>
-            <a:r>
-              <a:rPr b="0" lang="en-US" sz="3200" spc="-1" strike="noStrike">
-                <a:solidFill>
-                  <a:srgbClr val="000000"/>
-                </a:solidFill>
-                <a:latin typeface="Arial"/>
-              </a:rPr>
-              <a:t>Click to edit the outline text format</a:t>
-            </a:r>
-            <a:endParaRPr b="0" lang="en-US" sz="3200" spc="-1" strike="noStrike">
-              <a:solidFill>
-                <a:srgbClr val="000000"/>
-              </a:solidFill>
-              <a:latin typeface="Arial"/>
-            </a:endParaRPr>
-          </a:p>
-          <a:p>
-            <a:pPr lvl="1" marL="864000" indent="-324000">
-              <a:spcBef>
-                <a:spcPts val="1134"/>
-              </a:spcBef>
-              <a:buClr>
-                <a:srgbClr val="000000"/>
-              </a:buClr>
-              <a:buSzPct val="75000"/>
-              <a:buFont typeface="Symbol" charset="2"/>
-              <a:buChar char=""/>
-            </a:pPr>
-            <a:r>
-              <a:rPr b="0" lang="en-US" sz="2800" spc="-1" strike="noStrike">
-                <a:solidFill>
-                  <a:srgbClr val="000000"/>
-                </a:solidFill>
-                <a:latin typeface="Arial"/>
-              </a:rPr>
-              <a:t>Second Outline Level</a:t>
-            </a:r>
-            <a:endParaRPr b="0" lang="en-US" sz="2800" spc="-1" strike="noStrike">
-              <a:solidFill>
-                <a:srgbClr val="000000"/>
-              </a:solidFill>
-              <a:latin typeface="Arial"/>
-            </a:endParaRPr>
-          </a:p>
-          <a:p>
-            <a:pPr lvl="2" marL="1296000" indent="-288000">
-              <a:spcBef>
-                <a:spcPts val="850"/>
-              </a:spcBef>
-              <a:buClr>
-                <a:srgbClr val="000000"/>
-              </a:buClr>
-              <a:buSzPct val="45000"/>
-              <a:buFont typeface="Wingdings" charset="2"/>
-              <a:buChar char=""/>
-            </a:pPr>
-            <a:r>
-              <a:rPr b="0" lang="en-US" sz="2400" spc="-1" strike="noStrike">
-                <a:solidFill>
-                  <a:srgbClr val="000000"/>
-                </a:solidFill>
-                <a:latin typeface="Arial"/>
-              </a:rPr>
-              <a:t>Third Outline Level</a:t>
-            </a:r>
-            <a:endParaRPr b="0" lang="en-US" sz="2400" spc="-1" strike="noStrike">
-              <a:solidFill>
-                <a:srgbClr val="000000"/>
-              </a:solidFill>
-              <a:latin typeface="Arial"/>
-            </a:endParaRPr>
-          </a:p>
-          <a:p>
-            <a:pPr lvl="3" marL="1728000" indent="-216000">
-              <a:spcBef>
-                <a:spcPts val="567"/>
-              </a:spcBef>
-              <a:buClr>
-                <a:srgbClr val="000000"/>
-              </a:buClr>
-              <a:buSzPct val="75000"/>
-              <a:buFont typeface="Symbol" charset="2"/>
-              <a:buChar char=""/>
-            </a:pPr>
-            <a:r>
-              <a:rPr b="0" lang="en-US" sz="2000" spc="-1" strike="noStrike">
-                <a:solidFill>
-                  <a:srgbClr val="000000"/>
-                </a:solidFill>
-                <a:latin typeface="Arial"/>
-              </a:rPr>
-              <a:t>Fourth Outline Level</a:t>
-            </a:r>
-            <a:endParaRPr b="0" lang="en-US" sz="2000" spc="-1" strike="noStrike">
-              <a:solidFill>
-                <a:srgbClr val="000000"/>
-              </a:solidFill>
-              <a:latin typeface="Arial"/>
-            </a:endParaRPr>
-          </a:p>
-          <a:p>
-            <a:pPr lvl="4" marL="2160000" indent="-216000">
-              <a:spcBef>
-                <a:spcPts val="283"/>
-              </a:spcBef>
-              <a:buClr>
-                <a:srgbClr val="000000"/>
-              </a:buClr>
-              <a:buSzPct val="45000"/>
-              <a:buFont typeface="Wingdings" charset="2"/>
-              <a:buChar char=""/>
-            </a:pPr>
-            <a:r>
-              <a:rPr b="0" lang="en-US" sz="2000" spc="-1" strike="noStrike">
-                <a:solidFill>
-                  <a:srgbClr val="000000"/>
-                </a:solidFill>
-                <a:latin typeface="Arial"/>
-              </a:rPr>
-              <a:t>Fifth Outline Level</a:t>
-            </a:r>
-            <a:endParaRPr b="0" lang="en-US" sz="2000" spc="-1" strike="noStrike">
-              <a:solidFill>
-                <a:srgbClr val="000000"/>
-              </a:solidFill>
-              <a:latin typeface="Arial"/>
-            </a:endParaRPr>
-          </a:p>
-          <a:p>
-            <a:pPr lvl="5" marL="2592000" indent="-216000">
-              <a:spcBef>
-                <a:spcPts val="283"/>
-              </a:spcBef>
-              <a:buClr>
-                <a:srgbClr val="000000"/>
-              </a:buClr>
-              <a:buSzPct val="45000"/>
-              <a:buFont typeface="Wingdings" charset="2"/>
-              <a:buChar char=""/>
-            </a:pPr>
-            <a:r>
-              <a:rPr b="0" lang="en-US" sz="2000" spc="-1" strike="noStrike">
-                <a:solidFill>
-                  <a:srgbClr val="000000"/>
-                </a:solidFill>
-                <a:latin typeface="Arial"/>
-              </a:rPr>
-              <a:t>Sixth Outline Level</a:t>
-            </a:r>
-            <a:endParaRPr b="0" lang="en-US" sz="2000" spc="-1" strike="noStrike">
-              <a:solidFill>
-                <a:srgbClr val="000000"/>
-              </a:solidFill>
-              <a:latin typeface="Arial"/>
-            </a:endParaRPr>
-          </a:p>
-          <a:p>
-            <a:pPr lvl="6" marL="3024000" indent="-216000">
-              <a:spcBef>
-                <a:spcPts val="283"/>
-              </a:spcBef>
-              <a:buClr>
-                <a:srgbClr val="000000"/>
-              </a:buClr>
-              <a:buSzPct val="45000"/>
-              <a:buFont typeface="Wingdings" charset="2"/>
-              <a:buChar char=""/>
-            </a:pPr>
-            <a:r>
-              <a:rPr b="0" lang="en-US" sz="2000" spc="-1" strike="noStrike">
-                <a:solidFill>
-                  <a:srgbClr val="000000"/>
-                </a:solidFill>
-                <a:latin typeface="Arial"/>
-              </a:rPr>
-              <a:t>Seventh Outline Level</a:t>
-            </a:r>
-            <a:endParaRPr b="0" lang="en-US" sz="2000" spc="-1" strike="noStrike">
-              <a:solidFill>
-                <a:srgbClr val="000000"/>
-              </a:solidFill>
-              <a:latin typeface="Arial"/>
+          <a:lstStyle>
+            <a:lvl1pPr indent="0" algn="ctr">
+              <a:lnSpc>
+                <a:spcPct val="100000"/>
+              </a:lnSpc>
+              <a:buNone/>
+              <a:tabLst>
+                <a:tab algn="l" pos="0"/>
+              </a:tabLst>
+              <a:defRPr b="0" lang="en-US" sz="1400" spc="-1" strike="noStrike">
+                <a:solidFill>
+                  <a:srgbClr val="000000"/>
+                </a:solidFill>
+                <a:latin typeface="Times New Roman"/>
+              </a:defRPr>
+            </a:lvl1pPr>
+          </a:lstStyle>
+          <a:p>
+            <a:pPr indent="0" algn="ctr">
+              <a:lnSpc>
+                <a:spcPct val="100000"/>
+              </a:lnSpc>
+              <a:buNone/>
+              <a:tabLst>
+                <a:tab algn="l" pos="0"/>
+              </a:tabLst>
+            </a:pPr>
+            <a:r>
+              <a:rPr b="0" lang="en-US" sz="1400" spc="-1" strike="noStrike">
+                <a:solidFill>
+                  <a:srgbClr val="000000"/>
+                </a:solidFill>
+                <a:latin typeface="Times New Roman"/>
+              </a:rPr>
+              <a:t>&lt;footer&gt;</a:t>
+            </a:r>
+            <a:endParaRPr b="0" lang="en-US" sz="1400" spc="-1" strike="noStrike">
+              <a:solidFill>
+                <a:srgbClr val="000000"/>
+              </a:solidFill>
+              <a:latin typeface="Times New Roman"/>
             </a:endParaRPr>
           </a:p>
         </p:txBody>
@@ -473,13 +320,13 @@
             <a:spLocks noGrp="1"/>
           </p:cNvSpPr>
           <p:nvPr>
-            <p:ph type="dt" idx="1"/>
+            <p:ph type="sldNum" idx="2"/>
           </p:nvPr>
         </p:nvSpPr>
         <p:spPr>
           <a:xfrm>
-            <a:off x="504000" y="5165280"/>
-            <a:ext cx="2348280" cy="390600"/>
+            <a:off x="7227360" y="5165280"/>
+            <a:ext cx="2347920" cy="390240"/>
           </a:xfrm>
           <a:prstGeom prst="rect">
             <a:avLst/>
@@ -494,8 +341,14 @@
             <a:noAutofit/>
           </a:bodyPr>
           <a:lstStyle>
-            <a:lvl1pPr indent="0">
+            <a:lvl1pPr indent="0" algn="r">
+              <a:lnSpc>
+                <a:spcPct val="100000"/>
+              </a:lnSpc>
               <a:buNone/>
+              <a:tabLst>
+                <a:tab algn="l" pos="0"/>
+              </a:tabLst>
               <a:defRPr b="0" lang="en-US" sz="1400" spc="-1" strike="noStrike">
                 <a:solidFill>
                   <a:srgbClr val="000000"/>
@@ -505,18 +358,24 @@
             </a:lvl1pPr>
           </a:lstStyle>
           <a:p>
-            <a:pPr indent="0">
+            <a:pPr indent="0" algn="r">
+              <a:lnSpc>
+                <a:spcPct val="100000"/>
+              </a:lnSpc>
               <a:buNone/>
-            </a:pPr>
-            <a:r>
+              <a:tabLst>
+                <a:tab algn="l" pos="0"/>
+              </a:tabLst>
+            </a:pPr>
+            <a:fld id="{C2CE964D-1489-4B38-9AC1-39CB7DEDD169}" type="slidenum">
               <a:rPr b="0" lang="en-US" sz="1400" spc="-1" strike="noStrike">
                 <a:solidFill>
                   <a:srgbClr val="000000"/>
                 </a:solidFill>
                 <a:latin typeface="Times New Roman"/>
               </a:rPr>
-              <a:t>&lt;date/time&gt;</a:t>
-            </a:r>
+              <a:t>&lt;number&gt;</a:t>
+            </a:fld>
             <a:endParaRPr b="0" lang="en-US" sz="1400" spc="-1" strike="noStrike">
               <a:solidFill>
                 <a:srgbClr val="000000"/>
@@ -533,13 +392,13 @@
             <a:spLocks noGrp="1"/>
           </p:cNvSpPr>
           <p:nvPr>
-            <p:ph type="ftr" idx="2"/>
+            <p:ph type="dt" idx="3"/>
           </p:nvPr>
         </p:nvSpPr>
         <p:spPr>
           <a:xfrm>
-            <a:off x="3447360" y="5165280"/>
-            <a:ext cx="3195000" cy="390600"/>
+            <a:off x="504000" y="5165280"/>
+            <a:ext cx="2347920" cy="390240"/>
           </a:xfrm>
           <a:prstGeom prst="rect">
             <a:avLst/>
@@ -554,7 +413,7 @@
             <a:noAutofit/>
           </a:bodyPr>
           <a:lstStyle>
-            <a:lvl1pPr indent="0" algn="ctr">
+            <a:lvl1pPr indent="0">
               <a:buNone/>
               <a:defRPr b="0" lang="en-US" sz="1400" spc="-1" strike="noStrike">
                 <a:solidFill>
@@ -565,7 +424,7 @@
             </a:lvl1pPr>
           </a:lstStyle>
           <a:p>
-            <a:pPr indent="0" algn="ctr">
+            <a:pPr indent="0">
               <a:buNone/>
             </a:pPr>
             <a:r>
@@ -575,7 +434,7 @@
                 </a:solidFill>
                 <a:latin typeface="Times New Roman"/>
               </a:rPr>
-              <a:t>&lt;footer&gt;</a:t>
+              <a:t>&lt;date/time&gt;</a:t>
             </a:r>
             <a:endParaRPr b="0" lang="en-US" sz="1400" spc="-1" strike="noStrike">
               <a:solidFill>
@@ -593,13 +452,13 @@
             <a:spLocks noGrp="1"/>
           </p:cNvSpPr>
           <p:nvPr>
-            <p:ph type="sldNum" idx="3"/>
+            <p:ph type="body"/>
           </p:nvPr>
         </p:nvSpPr>
         <p:spPr>
           <a:xfrm>
-            <a:off x="7227360" y="5165280"/>
-            <a:ext cx="2348280" cy="390600"/>
+            <a:off x="504000" y="1326600"/>
+            <a:ext cx="9072000" cy="3288600"/>
           </a:xfrm>
           <a:prstGeom prst="rect">
             <a:avLst/>
@@ -611,37 +470,202 @@
         </p:spPr>
         <p:txBody>
           <a:bodyPr lIns="0" rIns="0" tIns="0" bIns="0" anchor="t">
-            <a:noAutofit/>
+            <a:normAutofit/>
           </a:bodyPr>
-          <a:lstStyle>
-            <a:lvl1pPr indent="0" algn="r">
-              <a:buNone/>
-              <a:defRPr b="0" lang="en-US" sz="1400" spc="-1" strike="noStrike">
-                <a:solidFill>
-                  <a:srgbClr val="000000"/>
-                </a:solidFill>
-                <a:latin typeface="Times New Roman"/>
-              </a:defRPr>
-            </a:lvl1pPr>
-          </a:lstStyle>
-          <a:p>
-            <a:pPr indent="0" algn="r">
-              <a:buNone/>
-            </a:pPr>
-            <a:fld id="{D507E463-6D26-4350-968C-CF5710642020}" type="slidenum">
-              <a:rPr b="0" lang="en-US" sz="1400" spc="-1" strike="noStrike">
-                <a:solidFill>
-                  <a:srgbClr val="000000"/>
-                </a:solidFill>
-                <a:latin typeface="Times New Roman"/>
-              </a:rPr>
-              <a:t>&lt;number&gt;</a:t>
-            </a:fld>
-            <a:endParaRPr b="0" lang="en-US" sz="1400" spc="-1" strike="noStrike">
-              <a:solidFill>
-                <a:srgbClr val="000000"/>
-              </a:solidFill>
-              <a:latin typeface="Times New Roman"/>
+          <a:p>
+            <a:pPr marL="432000" indent="-324000">
+              <a:spcBef>
+                <a:spcPts val="1417"/>
+              </a:spcBef>
+              <a:buClr>
+                <a:srgbClr val="000000"/>
+              </a:buClr>
+              <a:buSzPct val="45000"/>
+              <a:buFont typeface="Wingdings" charset="2"/>
+              <a:buChar char=""/>
+            </a:pPr>
+            <a:r>
+              <a:rPr b="0" lang="en-US" sz="3200" spc="-1" strike="noStrike">
+                <a:solidFill>
+                  <a:srgbClr val="000000"/>
+                </a:solidFill>
+                <a:latin typeface="Arial"/>
+              </a:rPr>
+              <a:t>Click to edit the outline text format</a:t>
+            </a:r>
+            <a:endParaRPr b="0" lang="en-US" sz="3200" spc="-1" strike="noStrike">
+              <a:solidFill>
+                <a:srgbClr val="000000"/>
+              </a:solidFill>
+              <a:latin typeface="Arial"/>
+            </a:endParaRPr>
+          </a:p>
+          <a:p>
+            <a:pPr lvl="1" marL="864000" indent="-324000">
+              <a:spcBef>
+                <a:spcPts val="1134"/>
+              </a:spcBef>
+              <a:buClr>
+                <a:srgbClr val="000000"/>
+              </a:buClr>
+              <a:buSzPct val="75000"/>
+              <a:buFont typeface="Symbol" charset="2"/>
+              <a:buChar char=""/>
+            </a:pPr>
+            <a:r>
+              <a:rPr b="0" lang="en-US" sz="2800" spc="-1" strike="noStrike">
+                <a:solidFill>
+                  <a:srgbClr val="000000"/>
+                </a:solidFill>
+                <a:latin typeface="Arial"/>
+              </a:rPr>
+              <a:t>Second Outline Level</a:t>
+            </a:r>
+            <a:endParaRPr b="0" lang="en-US" sz="2800" spc="-1" strike="noStrike">
+              <a:solidFill>
+                <a:srgbClr val="000000"/>
+              </a:solidFill>
+              <a:latin typeface="Arial"/>
+            </a:endParaRPr>
+          </a:p>
+          <a:p>
+            <a:pPr lvl="2" marL="1296000" indent="-288000">
+              <a:spcBef>
+                <a:spcPts val="850"/>
+              </a:spcBef>
+              <a:buClr>
+                <a:srgbClr val="000000"/>
+              </a:buClr>
+              <a:buSzPct val="45000"/>
+              <a:buFont typeface="Wingdings" charset="2"/>
+              <a:buChar char=""/>
+            </a:pPr>
+            <a:r>
+              <a:rPr b="0" lang="en-US" sz="2400" spc="-1" strike="noStrike">
+                <a:solidFill>
+                  <a:srgbClr val="000000"/>
+                </a:solidFill>
+                <a:latin typeface="Arial"/>
+              </a:rPr>
+              <a:t>Third Outline Level</a:t>
+            </a:r>
+            <a:endParaRPr b="0" lang="en-US" sz="2400" spc="-1" strike="noStrike">
+              <a:solidFill>
+                <a:srgbClr val="000000"/>
+              </a:solidFill>
+              <a:latin typeface="Arial"/>
+            </a:endParaRPr>
+          </a:p>
+          <a:p>
+            <a:pPr lvl="3" marL="1728000" indent="-216000">
+              <a:spcBef>
+                <a:spcPts val="567"/>
+              </a:spcBef>
+              <a:buClr>
+                <a:srgbClr val="000000"/>
+              </a:buClr>
+              <a:buSzPct val="75000"/>
+              <a:buFont typeface="Symbol" charset="2"/>
+              <a:buChar char=""/>
+            </a:pPr>
+            <a:r>
+              <a:rPr b="0" lang="en-US" sz="2000" spc="-1" strike="noStrike">
+                <a:solidFill>
+                  <a:srgbClr val="000000"/>
+                </a:solidFill>
+                <a:latin typeface="Arial"/>
+              </a:rPr>
+              <a:t>Fourth Outline Level</a:t>
+            </a:r>
+            <a:endParaRPr b="0" lang="en-US" sz="2000" spc="-1" strike="noStrike">
+              <a:solidFill>
+                <a:srgbClr val="000000"/>
+              </a:solidFill>
+              <a:latin typeface="Arial"/>
+            </a:endParaRPr>
+          </a:p>
+          <a:p>
+            <a:pPr lvl="4" marL="2160000" indent="-216000">
+              <a:spcBef>
+                <a:spcPts val="283"/>
+              </a:spcBef>
+              <a:buClr>
+                <a:srgbClr val="000000"/>
+              </a:buClr>
+              <a:buSzPct val="45000"/>
+              <a:buFont typeface="Wingdings" charset="2"/>
+              <a:buChar char=""/>
+            </a:pPr>
+            <a:r>
+              <a:rPr b="0" lang="en-US" sz="2000" spc="-1" strike="noStrike">
+                <a:solidFill>
+                  <a:srgbClr val="000000"/>
+                </a:solidFill>
+                <a:latin typeface="Arial"/>
+              </a:rPr>
+              <a:t>Fifth Outline Level</a:t>
+            </a:r>
+            <a:endParaRPr b="0" lang="en-US" sz="2000" spc="-1" strike="noStrike">
+              <a:solidFill>
+                <a:srgbClr val="000000"/>
+              </a:solidFill>
+              <a:latin typeface="Arial"/>
+            </a:endParaRPr>
+          </a:p>
+          <a:p>
+            <a:pPr lvl="5" marL="2592000" indent="-216000">
+              <a:spcBef>
+                <a:spcPts val="283"/>
+              </a:spcBef>
+              <a:buClr>
+                <a:srgbClr val="000000"/>
+              </a:buClr>
+              <a:buSzPct val="45000"/>
+              <a:buFont typeface="Wingdings" charset="2"/>
+              <a:buChar char=""/>
+            </a:pPr>
+            <a:r>
+              <a:rPr b="0" lang="en-US" sz="2000" spc="-1" strike="noStrike">
+                <a:solidFill>
+                  <a:srgbClr val="000000"/>
+                </a:solidFill>
+                <a:latin typeface="Arial"/>
+              </a:rPr>
+              <a:t>Sixth Outline Level</a:t>
+            </a:r>
+            <a:endParaRPr b="0" lang="en-US" sz="2000" spc="-1" strike="noStrike">
+              <a:solidFill>
+                <a:srgbClr val="000000"/>
+              </a:solidFill>
+              <a:latin typeface="Arial"/>
+            </a:endParaRPr>
+          </a:p>
+          <a:p>
+            <a:pPr lvl="6" marL="3024000" indent="-216000">
+              <a:spcBef>
+                <a:spcPts val="283"/>
+              </a:spcBef>
+              <a:buClr>
+                <a:srgbClr val="000000"/>
+              </a:buClr>
+              <a:buSzPct val="45000"/>
+              <a:buFont typeface="Wingdings" charset="2"/>
+              <a:buChar char=""/>
+            </a:pPr>
+            <a:r>
+              <a:rPr b="0" lang="en-US" sz="2000" spc="-1" strike="noStrike">
+                <a:solidFill>
+                  <a:srgbClr val="000000"/>
+                </a:solidFill>
+                <a:latin typeface="Arial"/>
+              </a:rPr>
+              <a:t>Seventh Outline Level</a:t>
+            </a:r>
+            <a:endParaRPr b="0" lang="en-US" sz="2000" spc="-1" strike="noStrike">
+              <a:solidFill>
+                <a:srgbClr val="000000"/>
+              </a:solidFill>
+              <a:latin typeface="Arial"/>
             </a:endParaRPr>
           </a:p>
         </p:txBody>
@@ -680,8 +704,8 @@
         </p:nvSpPr>
         <p:spPr>
           <a:xfrm>
-            <a:off x="4800600" y="457200"/>
-            <a:ext cx="4800600" cy="5029200"/>
+            <a:off x="5029560" y="457200"/>
+            <a:ext cx="4800240" cy="5028840"/>
           </a:xfrm>
           <a:prstGeom prst="rect">
             <a:avLst/>
@@ -706,11 +730,17 @@
             <a:noAutofit/>
           </a:bodyPr>
           <a:p>
+            <a:pPr>
+              <a:lnSpc>
+                <a:spcPct val="100000"/>
+              </a:lnSpc>
+            </a:pPr>
             <a:endParaRPr b="0" lang="en-US" sz="1800" spc="-1" strike="noStrike">
               <a:solidFill>
                 <a:srgbClr val="ffffff"/>
               </a:solidFill>
               <a:latin typeface="Arial"/>
+              <a:ea typeface="DejaVu Sans"/>
             </a:endParaRPr>
           </a:p>
         </p:txBody>
@@ -726,9 +756,9 @@
           <a:stretch/>
         </p:blipFill>
         <p:spPr>
-          <a:xfrm rot="21597000">
-            <a:off x="5259600" y="916200"/>
-            <a:ext cx="3943440" cy="4294080"/>
+          <a:xfrm>
+            <a:off x="228600" y="685800"/>
+            <a:ext cx="3737880" cy="4070520"/>
           </a:xfrm>
           <a:prstGeom prst="rect">
             <a:avLst/>
@@ -750,8 +780,8 @@
         </p:blipFill>
         <p:spPr>
           <a:xfrm>
-            <a:off x="228600" y="146880"/>
-            <a:ext cx="4063680" cy="4425120"/>
+            <a:off x="5443560" y="730080"/>
+            <a:ext cx="4157640" cy="4527720"/>
           </a:xfrm>
           <a:prstGeom prst="rect">
             <a:avLst/>

--- a/concepts/randomness/.graphics/sample plots.pptx
+++ b/concepts/randomness/.graphics/sample plots.pptx
@@ -143,7 +143,7 @@
         <p:txBody>
           <a:bodyPr/>
           <a:p>
-            <a:fld id="{9A2D8CC1-63E2-406D-A474-809593D80646}" type="slidenum">
+            <a:fld id="{E92DFA0D-D1AD-4592-9C72-251C3AD54E77}" type="slidenum">
               <a:t>&lt;#&gt;</a:t>
             </a:fld>
           </a:p>
@@ -367,7 +367,7 @@
                 <a:tab algn="l" pos="0"/>
               </a:tabLst>
             </a:pPr>
-            <a:fld id="{C2CE964D-1489-4B38-9AC1-39CB7DEDD169}" type="slidenum">
+            <a:fld id="{4D4E2B23-3882-481E-9125-D1D01A6E73D1}" type="slidenum">
               <a:rPr b="0" lang="en-US" sz="1400" spc="-1" strike="noStrike">
                 <a:solidFill>
                   <a:srgbClr val="000000"/>

--- a/concepts/randomness/.graphics/sample plots.pptx
+++ b/concepts/randomness/.graphics/sample plots.pptx
@@ -31,7 +31,7 @@
       </p:grpSpPr>
       <p:sp>
         <p:nvSpPr>
-          <p:cNvPr id="5" name="PlaceHolder 1"/>
+          <p:cNvPr id="4" name="PlaceHolder 1"/>
           <p:cNvSpPr>
             <a:spLocks noGrp="1"/>
           </p:cNvSpPr>
@@ -42,7 +42,7 @@
         <p:spPr>
           <a:xfrm>
             <a:off x="504000" y="226080"/>
-            <a:ext cx="9071280" cy="946080"/>
+            <a:ext cx="9070920" cy="945720"/>
           </a:xfrm>
           <a:prstGeom prst="rect">
             <a:avLst/>
@@ -71,7 +71,7 @@
       </p:sp>
       <p:sp>
         <p:nvSpPr>
-          <p:cNvPr id="6" name="PlaceHolder 2"/>
+          <p:cNvPr id="5" name="PlaceHolder 2"/>
           <p:cNvSpPr>
             <a:spLocks noGrp="1"/>
           </p:cNvSpPr>
@@ -143,7 +143,7 @@
         <p:txBody>
           <a:bodyPr/>
           <a:p>
-            <a:fld id="{E92DFA0D-D1AD-4592-9C72-251C3AD54E77}" type="slidenum">
+            <a:fld id="{F11E9E08-CE4A-4367-8419-B041F35314BB}" type="slidenum">
               <a:t>&lt;#&gt;</a:t>
             </a:fld>
           </a:p>
@@ -205,7 +205,7 @@
         <p:spPr>
           <a:xfrm>
             <a:off x="504000" y="226080"/>
-            <a:ext cx="9071280" cy="946080"/>
+            <a:ext cx="9070920" cy="945720"/>
           </a:xfrm>
           <a:prstGeom prst="rect">
             <a:avLst/>
@@ -254,7 +254,7 @@
         <p:spPr>
           <a:xfrm>
             <a:off x="3447360" y="5165280"/>
-            <a:ext cx="3194640" cy="390240"/>
+            <a:ext cx="3194280" cy="389880"/>
           </a:xfrm>
           <a:prstGeom prst="rect">
             <a:avLst/>
@@ -326,7 +326,7 @@
         <p:spPr>
           <a:xfrm>
             <a:off x="7227360" y="5165280"/>
-            <a:ext cx="2347920" cy="390240"/>
+            <a:ext cx="2347560" cy="389880"/>
           </a:xfrm>
           <a:prstGeom prst="rect">
             <a:avLst/>
@@ -367,7 +367,7 @@
                 <a:tab algn="l" pos="0"/>
               </a:tabLst>
             </a:pPr>
-            <a:fld id="{4D4E2B23-3882-481E-9125-D1D01A6E73D1}" type="slidenum">
+            <a:fld id="{382B70DF-9084-4DEA-AB93-9D73E22B91C1}" type="slidenum">
               <a:rPr b="0" lang="en-US" sz="1400" spc="-1" strike="noStrike">
                 <a:solidFill>
                   <a:srgbClr val="000000"/>
@@ -398,7 +398,7 @@
         <p:spPr>
           <a:xfrm>
             <a:off x="504000" y="5165280"/>
-            <a:ext cx="2347920" cy="390240"/>
+            <a:ext cx="2347560" cy="389880"/>
           </a:xfrm>
           <a:prstGeom prst="rect">
             <a:avLst/>
@@ -441,231 +441,6 @@
                 <a:srgbClr val="000000"/>
               </a:solidFill>
               <a:latin typeface="Times New Roman"/>
-            </a:endParaRPr>
-          </a:p>
-        </p:txBody>
-      </p:sp>
-      <p:sp>
-        <p:nvSpPr>
-          <p:cNvPr id="4" name="PlaceHolder 5"/>
-          <p:cNvSpPr>
-            <a:spLocks noGrp="1"/>
-          </p:cNvSpPr>
-          <p:nvPr>
-            <p:ph type="body"/>
-          </p:nvPr>
-        </p:nvSpPr>
-        <p:spPr>
-          <a:xfrm>
-            <a:off x="504000" y="1326600"/>
-            <a:ext cx="9072000" cy="3288600"/>
-          </a:xfrm>
-          <a:prstGeom prst="rect">
-            <a:avLst/>
-          </a:prstGeom>
-          <a:noFill/>
-          <a:ln w="0">
-            <a:noFill/>
-          </a:ln>
-        </p:spPr>
-        <p:txBody>
-          <a:bodyPr lIns="0" rIns="0" tIns="0" bIns="0" anchor="t">
-            <a:normAutofit/>
-          </a:bodyPr>
-          <a:p>
-            <a:pPr marL="432000" indent="-324000">
-              <a:spcBef>
-                <a:spcPts val="1417"/>
-              </a:spcBef>
-              <a:buClr>
-                <a:srgbClr val="000000"/>
-              </a:buClr>
-              <a:buSzPct val="45000"/>
-              <a:buFont typeface="Wingdings" charset="2"/>
-              <a:buChar char=""/>
-            </a:pPr>
-            <a:r>
-              <a:rPr b="0" lang="en-US" sz="3200" spc="-1" strike="noStrike">
-                <a:solidFill>
-                  <a:srgbClr val="000000"/>
-                </a:solidFill>
-                <a:latin typeface="Arial"/>
-              </a:rPr>
-              <a:t>Click to edit the outline text format</a:t>
-            </a:r>
-            <a:endParaRPr b="0" lang="en-US" sz="3200" spc="-1" strike="noStrike">
-              <a:solidFill>
-                <a:srgbClr val="000000"/>
-              </a:solidFill>
-              <a:latin typeface="Arial"/>
-            </a:endParaRPr>
-          </a:p>
-          <a:p>
-            <a:pPr lvl="1" marL="864000" indent="-324000">
-              <a:spcBef>
-                <a:spcPts val="1134"/>
-              </a:spcBef>
-              <a:buClr>
-                <a:srgbClr val="000000"/>
-              </a:buClr>
-              <a:buSzPct val="75000"/>
-              <a:buFont typeface="Symbol" charset="2"/>
-              <a:buChar char=""/>
-            </a:pPr>
-            <a:r>
-              <a:rPr b="0" lang="en-US" sz="2800" spc="-1" strike="noStrike">
-                <a:solidFill>
-                  <a:srgbClr val="000000"/>
-                </a:solidFill>
-                <a:latin typeface="Arial"/>
-              </a:rPr>
-              <a:t>Second Outline Level</a:t>
-            </a:r>
-            <a:endParaRPr b="0" lang="en-US" sz="2800" spc="-1" strike="noStrike">
-              <a:solidFill>
-                <a:srgbClr val="000000"/>
-              </a:solidFill>
-              <a:latin typeface="Arial"/>
-            </a:endParaRPr>
-          </a:p>
-          <a:p>
-            <a:pPr lvl="2" marL="1296000" indent="-288000">
-              <a:spcBef>
-                <a:spcPts val="850"/>
-              </a:spcBef>
-              <a:buClr>
-                <a:srgbClr val="000000"/>
-              </a:buClr>
-              <a:buSzPct val="45000"/>
-              <a:buFont typeface="Wingdings" charset="2"/>
-              <a:buChar char=""/>
-            </a:pPr>
-            <a:r>
-              <a:rPr b="0" lang="en-US" sz="2400" spc="-1" strike="noStrike">
-                <a:solidFill>
-                  <a:srgbClr val="000000"/>
-                </a:solidFill>
-                <a:latin typeface="Arial"/>
-              </a:rPr>
-              <a:t>Third Outline Level</a:t>
-            </a:r>
-            <a:endParaRPr b="0" lang="en-US" sz="2400" spc="-1" strike="noStrike">
-              <a:solidFill>
-                <a:srgbClr val="000000"/>
-              </a:solidFill>
-              <a:latin typeface="Arial"/>
-            </a:endParaRPr>
-          </a:p>
-          <a:p>
-            <a:pPr lvl="3" marL="1728000" indent="-216000">
-              <a:spcBef>
-                <a:spcPts val="567"/>
-              </a:spcBef>
-              <a:buClr>
-                <a:srgbClr val="000000"/>
-              </a:buClr>
-              <a:buSzPct val="75000"/>
-              <a:buFont typeface="Symbol" charset="2"/>
-              <a:buChar char=""/>
-            </a:pPr>
-            <a:r>
-              <a:rPr b="0" lang="en-US" sz="2000" spc="-1" strike="noStrike">
-                <a:solidFill>
-                  <a:srgbClr val="000000"/>
-                </a:solidFill>
-                <a:latin typeface="Arial"/>
-              </a:rPr>
-              <a:t>Fourth Outline Level</a:t>
-            </a:r>
-            <a:endParaRPr b="0" lang="en-US" sz="2000" spc="-1" strike="noStrike">
-              <a:solidFill>
-                <a:srgbClr val="000000"/>
-              </a:solidFill>
-              <a:latin typeface="Arial"/>
-            </a:endParaRPr>
-          </a:p>
-          <a:p>
-            <a:pPr lvl="4" marL="2160000" indent="-216000">
-              <a:spcBef>
-                <a:spcPts val="283"/>
-              </a:spcBef>
-              <a:buClr>
-                <a:srgbClr val="000000"/>
-              </a:buClr>
-              <a:buSzPct val="45000"/>
-              <a:buFont typeface="Wingdings" charset="2"/>
-              <a:buChar char=""/>
-            </a:pPr>
-            <a:r>
-              <a:rPr b="0" lang="en-US" sz="2000" spc="-1" strike="noStrike">
-                <a:solidFill>
-                  <a:srgbClr val="000000"/>
-                </a:solidFill>
-                <a:latin typeface="Arial"/>
-              </a:rPr>
-              <a:t>Fifth Outline Level</a:t>
-            </a:r>
-            <a:endParaRPr b="0" lang="en-US" sz="2000" spc="-1" strike="noStrike">
-              <a:solidFill>
-                <a:srgbClr val="000000"/>
-              </a:solidFill>
-              <a:latin typeface="Arial"/>
-            </a:endParaRPr>
-          </a:p>
-          <a:p>
-            <a:pPr lvl="5" marL="2592000" indent="-216000">
-              <a:spcBef>
-                <a:spcPts val="283"/>
-              </a:spcBef>
-              <a:buClr>
-                <a:srgbClr val="000000"/>
-              </a:buClr>
-              <a:buSzPct val="45000"/>
-              <a:buFont typeface="Wingdings" charset="2"/>
-              <a:buChar char=""/>
-            </a:pPr>
-            <a:r>
-              <a:rPr b="0" lang="en-US" sz="2000" spc="-1" strike="noStrike">
-                <a:solidFill>
-                  <a:srgbClr val="000000"/>
-                </a:solidFill>
-                <a:latin typeface="Arial"/>
-              </a:rPr>
-              <a:t>Sixth Outline Level</a:t>
-            </a:r>
-            <a:endParaRPr b="0" lang="en-US" sz="2000" spc="-1" strike="noStrike">
-              <a:solidFill>
-                <a:srgbClr val="000000"/>
-              </a:solidFill>
-              <a:latin typeface="Arial"/>
-            </a:endParaRPr>
-          </a:p>
-          <a:p>
-            <a:pPr lvl="6" marL="3024000" indent="-216000">
-              <a:spcBef>
-                <a:spcPts val="283"/>
-              </a:spcBef>
-              <a:buClr>
-                <a:srgbClr val="000000"/>
-              </a:buClr>
-              <a:buSzPct val="45000"/>
-              <a:buFont typeface="Wingdings" charset="2"/>
-              <a:buChar char=""/>
-            </a:pPr>
-            <a:r>
-              <a:rPr b="0" lang="en-US" sz="2000" spc="-1" strike="noStrike">
-                <a:solidFill>
-                  <a:srgbClr val="000000"/>
-                </a:solidFill>
-                <a:latin typeface="Arial"/>
-              </a:rPr>
-              <a:t>Seventh Outline Level</a:t>
-            </a:r>
-            <a:endParaRPr b="0" lang="en-US" sz="2000" spc="-1" strike="noStrike">
-              <a:solidFill>
-                <a:srgbClr val="000000"/>
-              </a:solidFill>
-              <a:latin typeface="Arial"/>
             </a:endParaRPr>
           </a:p>
         </p:txBody>
@@ -698,14 +473,14 @@
       </p:grpSpPr>
       <p:sp>
         <p:nvSpPr>
-          <p:cNvPr id="7" name=""/>
+          <p:cNvPr id="6" name=""/>
           <p:cNvSpPr/>
           <p:nvPr/>
         </p:nvSpPr>
         <p:spPr>
           <a:xfrm>
             <a:off x="5029560" y="457200"/>
-            <a:ext cx="4800240" cy="5028840"/>
+            <a:ext cx="4799880" cy="5028480"/>
           </a:xfrm>
           <a:prstGeom prst="rect">
             <a:avLst/>
@@ -747,7 +522,7 @@
       </p:sp>
       <p:pic>
         <p:nvPicPr>
-          <p:cNvPr id="8" name="" descr=""/>
+          <p:cNvPr id="7" name="" descr=""/>
           <p:cNvPicPr/>
           <p:nvPr/>
         </p:nvPicPr>
@@ -757,8 +532,8 @@
         </p:blipFill>
         <p:spPr>
           <a:xfrm>
-            <a:off x="228600" y="685800"/>
-            <a:ext cx="3737880" cy="4070520"/>
+            <a:off x="5443560" y="730080"/>
+            <a:ext cx="4157280" cy="4527360"/>
           </a:xfrm>
           <a:prstGeom prst="rect">
             <a:avLst/>
@@ -770,7 +545,7 @@
       </p:pic>
       <p:pic>
         <p:nvPicPr>
-          <p:cNvPr id="9" name="" descr=""/>
+          <p:cNvPr id="8" name="" descr=""/>
           <p:cNvPicPr/>
           <p:nvPr/>
         </p:nvPicPr>
@@ -780,8 +555,8 @@
         </p:blipFill>
         <p:spPr>
           <a:xfrm>
-            <a:off x="5443560" y="730080"/>
-            <a:ext cx="4157640" cy="4527720"/>
+            <a:off x="209880" y="457200"/>
+            <a:ext cx="4618440" cy="5029200"/>
           </a:xfrm>
           <a:prstGeom prst="rect">
             <a:avLst/>

--- a/concepts/randomness/.graphics/sample plots.pptx
+++ b/concepts/randomness/.graphics/sample plots.pptx
@@ -31,7 +31,7 @@
       </p:grpSpPr>
       <p:sp>
         <p:nvSpPr>
-          <p:cNvPr id="4" name="PlaceHolder 1"/>
+          <p:cNvPr id="5" name="PlaceHolder 1"/>
           <p:cNvSpPr>
             <a:spLocks noGrp="1"/>
           </p:cNvSpPr>
@@ -71,7 +71,7 @@
       </p:sp>
       <p:sp>
         <p:nvSpPr>
-          <p:cNvPr id="5" name="PlaceHolder 2"/>
+          <p:cNvPr id="6" name="PlaceHolder 2"/>
           <p:cNvSpPr>
             <a:spLocks noGrp="1"/>
           </p:cNvSpPr>
@@ -143,7 +143,7 @@
         <p:txBody>
           <a:bodyPr/>
           <a:p>
-            <a:fld id="{F11E9E08-CE4A-4367-8419-B041F35314BB}" type="slidenum">
+            <a:fld id="{BC3BEDDD-F28C-4C29-AF15-21CFF07FCC32}" type="slidenum">
               <a:t>&lt;#&gt;</a:t>
             </a:fld>
           </a:p>
@@ -367,7 +367,7 @@
                 <a:tab algn="l" pos="0"/>
               </a:tabLst>
             </a:pPr>
-            <a:fld id="{382B70DF-9084-4DEA-AB93-9D73E22B91C1}" type="slidenum">
+            <a:fld id="{FEF29294-80D6-40D4-A5C3-CDC68A7F1414}" type="slidenum">
               <a:rPr b="0" lang="en-US" sz="1400" spc="-1" strike="noStrike">
                 <a:solidFill>
                   <a:srgbClr val="000000"/>
@@ -441,6 +441,231 @@
                 <a:srgbClr val="000000"/>
               </a:solidFill>
               <a:latin typeface="Times New Roman"/>
+            </a:endParaRPr>
+          </a:p>
+        </p:txBody>
+      </p:sp>
+      <p:sp>
+        <p:nvSpPr>
+          <p:cNvPr id="4" name="PlaceHolder 5"/>
+          <p:cNvSpPr>
+            <a:spLocks noGrp="1"/>
+          </p:cNvSpPr>
+          <p:nvPr>
+            <p:ph type="body"/>
+          </p:nvPr>
+        </p:nvSpPr>
+        <p:spPr>
+          <a:xfrm>
+            <a:off x="504000" y="1326600"/>
+            <a:ext cx="9072000" cy="3288600"/>
+          </a:xfrm>
+          <a:prstGeom prst="rect">
+            <a:avLst/>
+          </a:prstGeom>
+          <a:noFill/>
+          <a:ln w="0">
+            <a:noFill/>
+          </a:ln>
+        </p:spPr>
+        <p:txBody>
+          <a:bodyPr lIns="0" rIns="0" tIns="0" bIns="0" anchor="t">
+            <a:normAutofit/>
+          </a:bodyPr>
+          <a:p>
+            <a:pPr marL="432000" indent="-324000">
+              <a:spcBef>
+                <a:spcPts val="1417"/>
+              </a:spcBef>
+              <a:buClr>
+                <a:srgbClr val="000000"/>
+              </a:buClr>
+              <a:buSzPct val="45000"/>
+              <a:buFont typeface="Wingdings" charset="2"/>
+              <a:buChar char=""/>
+            </a:pPr>
+            <a:r>
+              <a:rPr b="0" lang="en-US" sz="3200" spc="-1" strike="noStrike">
+                <a:solidFill>
+                  <a:srgbClr val="000000"/>
+                </a:solidFill>
+                <a:latin typeface="Arial"/>
+              </a:rPr>
+              <a:t>Click to edit the outline text format</a:t>
+            </a:r>
+            <a:endParaRPr b="0" lang="en-US" sz="3200" spc="-1" strike="noStrike">
+              <a:solidFill>
+                <a:srgbClr val="000000"/>
+              </a:solidFill>
+              <a:latin typeface="Arial"/>
+            </a:endParaRPr>
+          </a:p>
+          <a:p>
+            <a:pPr lvl="1" marL="864000" indent="-324000">
+              <a:spcBef>
+                <a:spcPts val="1134"/>
+              </a:spcBef>
+              <a:buClr>
+                <a:srgbClr val="000000"/>
+              </a:buClr>
+              <a:buSzPct val="75000"/>
+              <a:buFont typeface="Symbol" charset="2"/>
+              <a:buChar char=""/>
+            </a:pPr>
+            <a:r>
+              <a:rPr b="0" lang="en-US" sz="2800" spc="-1" strike="noStrike">
+                <a:solidFill>
+                  <a:srgbClr val="000000"/>
+                </a:solidFill>
+                <a:latin typeface="Arial"/>
+              </a:rPr>
+              <a:t>Second Outline Level</a:t>
+            </a:r>
+            <a:endParaRPr b="0" lang="en-US" sz="2800" spc="-1" strike="noStrike">
+              <a:solidFill>
+                <a:srgbClr val="000000"/>
+              </a:solidFill>
+              <a:latin typeface="Arial"/>
+            </a:endParaRPr>
+          </a:p>
+          <a:p>
+            <a:pPr lvl="2" marL="1296000" indent="-288000">
+              <a:spcBef>
+                <a:spcPts val="850"/>
+              </a:spcBef>
+              <a:buClr>
+                <a:srgbClr val="000000"/>
+              </a:buClr>
+              <a:buSzPct val="45000"/>
+              <a:buFont typeface="Wingdings" charset="2"/>
+              <a:buChar char=""/>
+            </a:pPr>
+            <a:r>
+              <a:rPr b="0" lang="en-US" sz="2400" spc="-1" strike="noStrike">
+                <a:solidFill>
+                  <a:srgbClr val="000000"/>
+                </a:solidFill>
+                <a:latin typeface="Arial"/>
+              </a:rPr>
+              <a:t>Third Outline Level</a:t>
+            </a:r>
+            <a:endParaRPr b="0" lang="en-US" sz="2400" spc="-1" strike="noStrike">
+              <a:solidFill>
+                <a:srgbClr val="000000"/>
+              </a:solidFill>
+              <a:latin typeface="Arial"/>
+            </a:endParaRPr>
+          </a:p>
+          <a:p>
+            <a:pPr lvl="3" marL="1728000" indent="-216000">
+              <a:spcBef>
+                <a:spcPts val="567"/>
+              </a:spcBef>
+              <a:buClr>
+                <a:srgbClr val="000000"/>
+              </a:buClr>
+              <a:buSzPct val="75000"/>
+              <a:buFont typeface="Symbol" charset="2"/>
+              <a:buChar char=""/>
+            </a:pPr>
+            <a:r>
+              <a:rPr b="0" lang="en-US" sz="2000" spc="-1" strike="noStrike">
+                <a:solidFill>
+                  <a:srgbClr val="000000"/>
+                </a:solidFill>
+                <a:latin typeface="Arial"/>
+              </a:rPr>
+              <a:t>Fourth Outline Level</a:t>
+            </a:r>
+            <a:endParaRPr b="0" lang="en-US" sz="2000" spc="-1" strike="noStrike">
+              <a:solidFill>
+                <a:srgbClr val="000000"/>
+              </a:solidFill>
+              <a:latin typeface="Arial"/>
+            </a:endParaRPr>
+          </a:p>
+          <a:p>
+            <a:pPr lvl="4" marL="2160000" indent="-216000">
+              <a:spcBef>
+                <a:spcPts val="283"/>
+              </a:spcBef>
+              <a:buClr>
+                <a:srgbClr val="000000"/>
+              </a:buClr>
+              <a:buSzPct val="45000"/>
+              <a:buFont typeface="Wingdings" charset="2"/>
+              <a:buChar char=""/>
+            </a:pPr>
+            <a:r>
+              <a:rPr b="0" lang="en-US" sz="2000" spc="-1" strike="noStrike">
+                <a:solidFill>
+                  <a:srgbClr val="000000"/>
+                </a:solidFill>
+                <a:latin typeface="Arial"/>
+              </a:rPr>
+              <a:t>Fifth Outline Level</a:t>
+            </a:r>
+            <a:endParaRPr b="0" lang="en-US" sz="2000" spc="-1" strike="noStrike">
+              <a:solidFill>
+                <a:srgbClr val="000000"/>
+              </a:solidFill>
+              <a:latin typeface="Arial"/>
+            </a:endParaRPr>
+          </a:p>
+          <a:p>
+            <a:pPr lvl="5" marL="2592000" indent="-216000">
+              <a:spcBef>
+                <a:spcPts val="283"/>
+              </a:spcBef>
+              <a:buClr>
+                <a:srgbClr val="000000"/>
+              </a:buClr>
+              <a:buSzPct val="45000"/>
+              <a:buFont typeface="Wingdings" charset="2"/>
+              <a:buChar char=""/>
+            </a:pPr>
+            <a:r>
+              <a:rPr b="0" lang="en-US" sz="2000" spc="-1" strike="noStrike">
+                <a:solidFill>
+                  <a:srgbClr val="000000"/>
+                </a:solidFill>
+                <a:latin typeface="Arial"/>
+              </a:rPr>
+              <a:t>Sixth Outline Level</a:t>
+            </a:r>
+            <a:endParaRPr b="0" lang="en-US" sz="2000" spc="-1" strike="noStrike">
+              <a:solidFill>
+                <a:srgbClr val="000000"/>
+              </a:solidFill>
+              <a:latin typeface="Arial"/>
+            </a:endParaRPr>
+          </a:p>
+          <a:p>
+            <a:pPr lvl="6" marL="3024000" indent="-216000">
+              <a:spcBef>
+                <a:spcPts val="283"/>
+              </a:spcBef>
+              <a:buClr>
+                <a:srgbClr val="000000"/>
+              </a:buClr>
+              <a:buSzPct val="45000"/>
+              <a:buFont typeface="Wingdings" charset="2"/>
+              <a:buChar char=""/>
+            </a:pPr>
+            <a:r>
+              <a:rPr b="0" lang="en-US" sz="2000" spc="-1" strike="noStrike">
+                <a:solidFill>
+                  <a:srgbClr val="000000"/>
+                </a:solidFill>
+                <a:latin typeface="Arial"/>
+              </a:rPr>
+              <a:t>Seventh Outline Level</a:t>
+            </a:r>
+            <a:endParaRPr b="0" lang="en-US" sz="2000" spc="-1" strike="noStrike">
+              <a:solidFill>
+                <a:srgbClr val="000000"/>
+              </a:solidFill>
+              <a:latin typeface="Arial"/>
             </a:endParaRPr>
           </a:p>
         </p:txBody>
@@ -473,7 +698,7 @@
       </p:grpSpPr>
       <p:sp>
         <p:nvSpPr>
-          <p:cNvPr id="6" name=""/>
+          <p:cNvPr id="7" name=""/>
           <p:cNvSpPr/>
           <p:nvPr/>
         </p:nvSpPr>
@@ -522,7 +747,7 @@
       </p:sp>
       <p:pic>
         <p:nvPicPr>
-          <p:cNvPr id="7" name="" descr=""/>
+          <p:cNvPr id="8" name="" descr=""/>
           <p:cNvPicPr/>
           <p:nvPr/>
         </p:nvPicPr>
@@ -532,8 +757,8 @@
         </p:blipFill>
         <p:spPr>
           <a:xfrm>
-            <a:off x="5443560" y="730080"/>
-            <a:ext cx="4157280" cy="4527360"/>
+            <a:off x="228600" y="501480"/>
+            <a:ext cx="4367520" cy="4756320"/>
           </a:xfrm>
           <a:prstGeom prst="rect">
             <a:avLst/>
@@ -545,7 +770,7 @@
       </p:pic>
       <p:pic>
         <p:nvPicPr>
-          <p:cNvPr id="8" name="" descr=""/>
+          <p:cNvPr id="9" name="" descr=""/>
           <p:cNvPicPr/>
           <p:nvPr/>
         </p:nvPicPr>
@@ -555,8 +780,8 @@
         </p:blipFill>
         <p:spPr>
           <a:xfrm>
-            <a:off x="209880" y="457200"/>
-            <a:ext cx="4618440" cy="5029200"/>
+            <a:off x="5715000" y="914400"/>
+            <a:ext cx="3737880" cy="4070520"/>
           </a:xfrm>
           <a:prstGeom prst="rect">
             <a:avLst/>
